--- a/presentations/Изотов_ВКР_нейросетевая-модель.pptx
+++ b/presentations/Изотов_ВКР_нейросетевая-модель.pptx
@@ -3251,7 +3251,7 @@
               <a:buNone/>
             </a:pPr>
             <a:r>
-              <a:rPr lang="ru-RU" sz="1250" b="1" spc="250" kern="0" dirty="0">
+              <a:rPr lang="ru-RU" sz="1500" b="1" spc="250" kern="0" dirty="0">
                 <a:solidFill>
                   <a:srgbClr val="1F9BD8"/>
                 </a:solidFill>
@@ -4510,7 +4510,7 @@
               <a:buNone/>
             </a:pPr>
             <a:r>
-              <a:rPr lang="ru-RU" sz="1250" b="1" kern="0" dirty="0">
+              <a:rPr lang="ru-RU" sz="1500" b="1" kern="0" dirty="0">
                 <a:solidFill>
                   <a:srgbClr val="1F9BD8"/>
                 </a:solidFill>
@@ -4518,7 +4518,7 @@
                 <a:ea typeface="Calibri" pitchFamily="34" charset="-122"/>
                 <a:cs typeface="Calibri" pitchFamily="34" charset="-120"/>
               </a:rPr>
-              <a:t>О ПРОЕКТЕ</a:t>
+              <a:t>ПРОБЛЕМАТИКА</a:t>
             </a:r>
           </a:p>
         </p:txBody>
@@ -4532,7 +4532,7 @@
         <p:spPr>
           <a:xfrm>
             <a:off x="640080" y="749808"/>
-            <a:ext cx="10000000" cy="640080"/>
+            <a:ext cx="10200000" cy="640080"/>
           </a:xfrm>
           <a:prstGeom prst="rect">
             <a:avLst/>
@@ -4548,7 +4548,7 @@
               <a:buNone/>
             </a:pPr>
             <a:r>
-              <a:rPr lang="ru-RU" sz="3000" b="1" kern="0" dirty="0">
+              <a:rPr lang="ru-RU" sz="2800" b="1" kern="0" dirty="0">
                 <a:solidFill>
                   <a:srgbClr val="111418"/>
                 </a:solidFill>
@@ -4556,7 +4556,7 @@
                 <a:ea typeface="Cambria" pitchFamily="34" charset="-122"/>
                 <a:cs typeface="Cambria" pitchFamily="34" charset="-120"/>
               </a:rPr>
-              <a:t>Адаптивная игровая система</a:t>
+              <a:t>Отсутствие адаптивного геймдизайна</a:t>
             </a:r>
           </a:p>
         </p:txBody>
@@ -4632,7 +4632,7 @@
                 <a:ea typeface="Calibri" pitchFamily="34" charset="-122"/>
                 <a:cs typeface="Calibri" pitchFamily="34" charset="-120"/>
               </a:rPr>
-              <a:t>Игра подстраивается под игрока в реальном времени: телеметрия → анализ → адаптация. Три части работают как единый цикл.</a:t>
+              <a:t>Большинство игр одинаковы для всех и не подстраиваются под стиль конкретного игрока.</a:t>
             </a:r>
           </a:p>
         </p:txBody>
@@ -4690,30 +4690,44 @@
           <a:ln/>
         </p:spPr>
       </p:sp>
-      <p:pic>
-        <p:nvPicPr>
-          <p:cNvPr id="107" name="I"/>
-          <p:cNvPicPr>
-            <a:picLocks noChangeAspect="1"/>
-          </p:cNvPicPr>
-          <p:nvPr/>
-        </p:nvPicPr>
-        <p:blipFill>
-          <a:blip r:embed="rId2"/>
-          <a:stretch>
-            <a:fillRect/>
-          </a:stretch>
-        </p:blipFill>
-        <p:spPr>
-          <a:xfrm>
-            <a:off x="2197440" y="2640000"/>
-            <a:ext cx="360000" cy="360000"/>
-          </a:xfrm>
-          <a:prstGeom prst="rect">
-            <a:avLst/>
-          </a:prstGeom>
-        </p:spPr>
-      </p:pic>
+      <p:sp>
+        <p:nvSpPr>
+          <p:cNvPr id="107" name="T"/>
+          <p:cNvSpPr/>
+          <p:nvPr/>
+        </p:nvSpPr>
+        <p:spPr>
+          <a:xfrm>
+            <a:off x="2037440" y="2480000"/>
+            <a:ext cx="680000" cy="680000"/>
+          </a:xfrm>
+          <a:prstGeom prst="rect">
+            <a:avLst/>
+          </a:prstGeom>
+          <a:noFill/>
+          <a:ln/>
+        </p:spPr>
+        <p:txBody>
+          <a:bodyPr wrap="square" lIns="0" tIns="0" rIns="0" bIns="0" rtlCol="0" anchor="ctr"/>
+          <a:lstStyle/>
+          <a:p>
+            <a:pPr algn="ctr" indent="0" marL="0">
+              <a:buNone/>
+            </a:pPr>
+            <a:r>
+              <a:rPr lang="ru-RU" sz="2400" b="1" kern="0" dirty="0">
+                <a:solidFill>
+                  <a:srgbClr val="FFFFFF"/>
+                </a:solidFill>
+                <a:latin typeface="Calibri" pitchFamily="34" charset="0"/>
+                <a:ea typeface="Calibri" pitchFamily="34" charset="-122"/>
+                <a:cs typeface="Calibri" pitchFamily="34" charset="-120"/>
+              </a:rPr>
+              <a:t>1</a:t>
+            </a:r>
+          </a:p>
+        </p:txBody>
+      </p:sp>
       <p:sp>
         <p:nvSpPr>
           <p:cNvPr id="108" name="T"/>
@@ -4722,8 +4736,8 @@
         </p:nvSpPr>
         <p:spPr>
           <a:xfrm>
-            <a:off x="940080" y="3360000"/>
-            <a:ext cx="2874720" cy="400000"/>
+            <a:off x="900080" y="3360000"/>
+            <a:ext cx="2954720" cy="440000"/>
           </a:xfrm>
           <a:prstGeom prst="rect">
             <a:avLst/>
@@ -4739,7 +4753,7 @@
               <a:buNone/>
             </a:pPr>
             <a:r>
-              <a:rPr lang="ru-RU" sz="1700" b="1" kern="0" dirty="0">
+              <a:rPr lang="ru-RU" sz="1600" b="1" kern="0" dirty="0">
                 <a:solidFill>
                   <a:srgbClr val="111418"/>
                 </a:solidFill>
@@ -4747,7 +4761,7 @@
                 <a:ea typeface="Cambria" pitchFamily="34" charset="-122"/>
                 <a:cs typeface="Cambria" pitchFamily="34" charset="-120"/>
               </a:rPr>
-              <a:t>Клиент</a:t>
+              <a:t>Один баланс для всех</a:t>
             </a:r>
           </a:p>
         </p:txBody>
@@ -4760,8 +4774,8 @@
         </p:nvSpPr>
         <p:spPr>
           <a:xfrm>
-            <a:off x="940080" y="3840000"/>
-            <a:ext cx="2874720" cy="640000"/>
+            <a:off x="900080" y="3880000"/>
+            <a:ext cx="2954720" cy="560000"/>
           </a:xfrm>
           <a:prstGeom prst="rect">
             <a:avLst/>
@@ -4785,7 +4799,7 @@
                 <a:ea typeface="Calibri" pitchFamily="34" charset="-122"/>
                 <a:cs typeface="Calibri" pitchFamily="34" charset="-120"/>
               </a:rPr>
-              <a:t>Godot собирает события игрока и отправляет телеметрию</a:t>
+              <a:t>стиль игрока не учитывается</a:t>
             </a:r>
           </a:p>
         </p:txBody>
@@ -4843,30 +4857,44 @@
           <a:ln/>
         </p:spPr>
       </p:sp>
-      <p:pic>
-        <p:nvPicPr>
-          <p:cNvPr id="112" name="I"/>
-          <p:cNvPicPr>
-            <a:picLocks noChangeAspect="1"/>
-          </p:cNvPicPr>
-          <p:nvPr/>
-        </p:nvPicPr>
-        <p:blipFill>
-          <a:blip r:embed="rId3"/>
-          <a:stretch>
-            <a:fillRect/>
-          </a:stretch>
-        </p:blipFill>
-        <p:spPr>
-          <a:xfrm>
-            <a:off x="5909904" y="2640000"/>
-            <a:ext cx="360000" cy="360000"/>
-          </a:xfrm>
-          <a:prstGeom prst="rect">
-            <a:avLst/>
-          </a:prstGeom>
-        </p:spPr>
-      </p:pic>
+      <p:sp>
+        <p:nvSpPr>
+          <p:cNvPr id="112" name="T"/>
+          <p:cNvSpPr/>
+          <p:nvPr/>
+        </p:nvSpPr>
+        <p:spPr>
+          <a:xfrm>
+            <a:off x="5749904" y="2480000"/>
+            <a:ext cx="680000" cy="680000"/>
+          </a:xfrm>
+          <a:prstGeom prst="rect">
+            <a:avLst/>
+          </a:prstGeom>
+          <a:noFill/>
+          <a:ln/>
+        </p:spPr>
+        <p:txBody>
+          <a:bodyPr wrap="square" lIns="0" tIns="0" rIns="0" bIns="0" rtlCol="0" anchor="ctr"/>
+          <a:lstStyle/>
+          <a:p>
+            <a:pPr algn="ctr" indent="0" marL="0">
+              <a:buNone/>
+            </a:pPr>
+            <a:r>
+              <a:rPr lang="ru-RU" sz="2400" b="1" kern="0" dirty="0">
+                <a:solidFill>
+                  <a:srgbClr val="FFFFFF"/>
+                </a:solidFill>
+                <a:latin typeface="Calibri" pitchFamily="34" charset="0"/>
+                <a:ea typeface="Calibri" pitchFamily="34" charset="-122"/>
+                <a:cs typeface="Calibri" pitchFamily="34" charset="-120"/>
+              </a:rPr>
+              <a:t>2</a:t>
+            </a:r>
+          </a:p>
+        </p:txBody>
+      </p:sp>
       <p:sp>
         <p:nvSpPr>
           <p:cNvPr id="113" name="T"/>
@@ -4875,8 +4903,8 @@
         </p:nvSpPr>
         <p:spPr>
           <a:xfrm>
-            <a:off x="4652544" y="3360000"/>
-            <a:ext cx="2874720" cy="400000"/>
+            <a:off x="4612544" y="3360000"/>
+            <a:ext cx="2954720" cy="440000"/>
           </a:xfrm>
           <a:prstGeom prst="rect">
             <a:avLst/>
@@ -4892,7 +4920,7 @@
               <a:buNone/>
             </a:pPr>
             <a:r>
-              <a:rPr lang="ru-RU" sz="1700" b="1" kern="0" dirty="0">
+              <a:rPr lang="ru-RU" sz="1600" b="1" kern="0" dirty="0">
                 <a:solidFill>
                   <a:srgbClr val="111418"/>
                 </a:solidFill>
@@ -4900,7 +4928,7 @@
                 <a:ea typeface="Cambria" pitchFamily="34" charset="-122"/>
                 <a:cs typeface="Cambria" pitchFamily="34" charset="-120"/>
               </a:rPr>
-              <a:t>Сервер</a:t>
+              <a:t>Ручная настройка</a:t>
             </a:r>
           </a:p>
         </p:txBody>
@@ -4913,8 +4941,8 @@
         </p:nvSpPr>
         <p:spPr>
           <a:xfrm>
-            <a:off x="4652544" y="3840000"/>
-            <a:ext cx="2874720" cy="640000"/>
+            <a:off x="4612544" y="3880000"/>
+            <a:ext cx="2954720" cy="560000"/>
           </a:xfrm>
           <a:prstGeom prst="rect">
             <a:avLst/>
@@ -4938,7 +4966,7 @@
                 <a:ea typeface="Calibri" pitchFamily="34" charset="-122"/>
                 <a:cs typeface="Calibri" pitchFamily="34" charset="-120"/>
               </a:rPr>
-              <a:t>FastAPI + PostgreSQL принимает, хранит и строит признаки</a:t>
+              <a:t>сложность задаётся вслепую, одинаково</a:t>
             </a:r>
           </a:p>
         </p:txBody>
@@ -4996,30 +5024,44 @@
           <a:ln/>
         </p:spPr>
       </p:sp>
-      <p:pic>
-        <p:nvPicPr>
-          <p:cNvPr id="117" name="I"/>
-          <p:cNvPicPr>
-            <a:picLocks noChangeAspect="1"/>
-          </p:cNvPicPr>
-          <p:nvPr/>
-        </p:nvPicPr>
-        <p:blipFill>
-          <a:blip r:embed="rId4"/>
-          <a:stretch>
-            <a:fillRect/>
-          </a:stretch>
-        </p:blipFill>
-        <p:spPr>
-          <a:xfrm>
-            <a:off x="9622368" y="2640000"/>
-            <a:ext cx="360000" cy="360000"/>
-          </a:xfrm>
-          <a:prstGeom prst="rect">
-            <a:avLst/>
-          </a:prstGeom>
-        </p:spPr>
-      </p:pic>
+      <p:sp>
+        <p:nvSpPr>
+          <p:cNvPr id="117" name="T"/>
+          <p:cNvSpPr/>
+          <p:nvPr/>
+        </p:nvSpPr>
+        <p:spPr>
+          <a:xfrm>
+            <a:off x="9462368" y="2480000"/>
+            <a:ext cx="680000" cy="680000"/>
+          </a:xfrm>
+          <a:prstGeom prst="rect">
+            <a:avLst/>
+          </a:prstGeom>
+          <a:noFill/>
+          <a:ln/>
+        </p:spPr>
+        <p:txBody>
+          <a:bodyPr wrap="square" lIns="0" tIns="0" rIns="0" bIns="0" rtlCol="0" anchor="ctr"/>
+          <a:lstStyle/>
+          <a:p>
+            <a:pPr algn="ctr" indent="0" marL="0">
+              <a:buNone/>
+            </a:pPr>
+            <a:r>
+              <a:rPr lang="ru-RU" sz="2400" b="1" kern="0" dirty="0">
+                <a:solidFill>
+                  <a:srgbClr val="FFFFFF"/>
+                </a:solidFill>
+                <a:latin typeface="Calibri" pitchFamily="34" charset="0"/>
+                <a:ea typeface="Calibri" pitchFamily="34" charset="-122"/>
+                <a:cs typeface="Calibri" pitchFamily="34" charset="-120"/>
+              </a:rPr>
+              <a:t>3</a:t>
+            </a:r>
+          </a:p>
+        </p:txBody>
+      </p:sp>
       <p:sp>
         <p:nvSpPr>
           <p:cNvPr id="118" name="T"/>
@@ -5028,8 +5070,8 @@
         </p:nvSpPr>
         <p:spPr>
           <a:xfrm>
-            <a:off x="8365008" y="3360000"/>
-            <a:ext cx="2874720" cy="400000"/>
+            <a:off x="8325008" y="3360000"/>
+            <a:ext cx="2954720" cy="440000"/>
           </a:xfrm>
           <a:prstGeom prst="rect">
             <a:avLst/>
@@ -5045,7 +5087,7 @@
               <a:buNone/>
             </a:pPr>
             <a:r>
-              <a:rPr lang="ru-RU" sz="1700" b="1" kern="0" dirty="0">
+              <a:rPr lang="ru-RU" sz="1600" b="1" kern="0" dirty="0">
                 <a:solidFill>
                   <a:srgbClr val="111418"/>
                 </a:solidFill>
@@ -5053,7 +5095,7 @@
                 <a:ea typeface="Cambria" pitchFamily="34" charset="-122"/>
                 <a:cs typeface="Cambria" pitchFamily="34" charset="-120"/>
               </a:rPr>
-              <a:t>Модель</a:t>
+              <a:t>Падение вовлечённости</a:t>
             </a:r>
           </a:p>
         </p:txBody>
@@ -5066,8 +5108,8 @@
         </p:nvSpPr>
         <p:spPr>
           <a:xfrm>
-            <a:off x="8365008" y="3840000"/>
-            <a:ext cx="2874720" cy="640000"/>
+            <a:off x="8325008" y="3880000"/>
+            <a:ext cx="2954720" cy="560000"/>
           </a:xfrm>
           <a:prstGeom prst="rect">
             <a:avLst/>
@@ -5091,7 +5133,7 @@
                 <a:ea typeface="Calibri" pitchFamily="34" charset="-122"/>
                 <a:cs typeface="Calibri" pitchFamily="34" charset="-120"/>
               </a:rPr>
-              <a:t>нейросеть определяет архетип и возвращает адаптацию</a:t>
+              <a:t>игроки теряют интерес и уходят</a:t>
             </a:r>
           </a:p>
         </p:txBody>
@@ -5129,7 +5171,7 @@
                 <a:ea typeface="Calibri" pitchFamily="34" charset="-122"/>
                 <a:cs typeface="Calibri" pitchFamily="34" charset="-120"/>
               </a:rPr>
-              <a:t>Игра, сервер и модель образуют единый цикл адаптации.</a:t>
+              <a:t>Решение — адаптация геймплея под архетип игрока.</a:t>
             </a:r>
           </a:p>
         </p:txBody>
@@ -5192,7 +5234,7 @@
               <a:buNone/>
             </a:pPr>
             <a:r>
-              <a:rPr lang="ru-RU" sz="1250" b="1" kern="0" dirty="0">
+              <a:rPr lang="ru-RU" sz="1500" b="1" kern="0" dirty="0">
                 <a:solidFill>
                   <a:srgbClr val="1F9BD8"/>
                 </a:solidFill>
@@ -5200,7 +5242,7 @@
                 <a:ea typeface="Calibri" pitchFamily="34" charset="-122"/>
                 <a:cs typeface="Calibri" pitchFamily="34" charset="-120"/>
               </a:rPr>
-              <a:t>ПРОБЛЕМАТИКА</a:t>
+              <a:t>ВОВЛЕЧЁННОСТЬ ИГРОКОВ</a:t>
             </a:r>
           </a:p>
         </p:txBody>
@@ -5238,7 +5280,7 @@
                 <a:ea typeface="Cambria" pitchFamily="34" charset="-122"/>
                 <a:cs typeface="Cambria" pitchFamily="34" charset="-120"/>
               </a:rPr>
-              <a:t>Нет адаптивного геймдизайна</a:t>
+              <a:t>Игроки уходят по-разному</a:t>
             </a:r>
           </a:p>
         </p:txBody>
@@ -5314,7 +5356,7 @@
                 <a:ea typeface="Calibri" pitchFamily="34" charset="-122"/>
                 <a:cs typeface="Calibri" pitchFamily="34" charset="-120"/>
               </a:rPr>
-              <a:t>Классическая игра одинакова для всех и не подстраивается под стиль игрока. Разные типы игроков теряют интерес по-разному — без адаптации многие быстро уходят.</a:t>
+              <a:t>Без подстройки под стиль игрока разные типы игроков теряют интерес по-разному.</a:t>
             </a:r>
           </a:p>
         </p:txBody>
@@ -5851,7 +5893,7 @@
               <a:buNone/>
             </a:pPr>
             <a:r>
-              <a:rPr lang="en-US" sz="1250" b="1" spc="250" kern="0" dirty="0">
+              <a:rPr lang="en-US" sz="1500" b="1" spc="250" kern="0" dirty="0">
                 <a:solidFill>
                   <a:srgbClr val="1F9BD8"/>
                 </a:solidFill>
@@ -5861,7 +5903,7 @@
               </a:rPr>
               <a:t>АКТУАЛЬНОСТЬ</a:t>
             </a:r>
-            <a:endParaRPr lang="en-US" sz="1250" dirty="0"/>
+            <a:endParaRPr lang="en-US" sz="1500" dirty="0"/>
           </a:p>
         </p:txBody>
       </p:sp>
@@ -6498,7 +6540,7 @@
               <a:buNone/>
             </a:pPr>
             <a:r>
-              <a:rPr lang="en-US" sz="1250" b="1" spc="250" kern="0" dirty="0">
+              <a:rPr lang="en-US" sz="1500" b="1" spc="250" kern="0" dirty="0">
                 <a:solidFill>
                   <a:srgbClr val="1F9BD8"/>
                 </a:solidFill>
@@ -6508,7 +6550,7 @@
               </a:rPr>
               <a:t>АРХИТЕКТУРА</a:t>
             </a:r>
-            <a:endParaRPr lang="en-US" sz="1250" dirty="0"/>
+            <a:endParaRPr lang="en-US" sz="1500" dirty="0"/>
           </a:p>
         </p:txBody>
       </p:sp>
@@ -7415,7 +7457,7 @@
               <a:buNone/>
             </a:pPr>
             <a:r>
-              <a:rPr lang="en-US" sz="1250" b="1" spc="250" kern="0" dirty="0">
+              <a:rPr lang="en-US" sz="1500" b="1" spc="250" kern="0" dirty="0">
                 <a:solidFill>
                   <a:srgbClr val="1F9BD8"/>
                 </a:solidFill>
@@ -7425,7 +7467,7 @@
               </a:rPr>
               <a:t>НЕЙРОННАЯ МОДЕЛЬ · 1/3</a:t>
             </a:r>
-            <a:endParaRPr lang="en-US" sz="1250" dirty="0"/>
+            <a:endParaRPr lang="en-US" sz="1500" dirty="0"/>
           </a:p>
         </p:txBody>
       </p:sp>
@@ -7577,7 +7619,7 @@
                 <a:ea typeface="Calibri" pitchFamily="34" charset="-122"/>
                 <a:cs typeface="Calibri" pitchFamily="34" charset="-120"/>
               </a:rPr>
-              <a:t>Многоклассовая классификация:</a:t>
+              <a:t>Что делает модель:</a:t>
             </a:r>
             <a:endParaRPr lang="en-US" sz="1350" dirty="0"/>
           </a:p>
@@ -7597,7 +7639,7 @@
                 <a:ea typeface="Calibri" pitchFamily="34" charset="-122"/>
                 <a:cs typeface="Calibri" pitchFamily="34" charset="-120"/>
               </a:rPr>
-              <a:t>последовательность событий сессии → один из архетипов</a:t>
+              <a:t>по действиям игрока за сессию определяет его тип</a:t>
             </a:r>
             <a:endParaRPr lang="en-US" sz="1350" dirty="0"/>
           </a:p>
@@ -7638,7 +7680,7 @@
                 <a:ea typeface="Calibri" pitchFamily="34" charset="-122"/>
                 <a:cs typeface="Calibri" pitchFamily="34" charset="-120"/>
               </a:rPr>
-              <a:t xml:space="preserve">Признаки: </a:t>
+              <a:t xml:space="preserve">Учитывает: </a:t>
             </a:r>
             <a:pPr indent="0" marL="0">
               <a:lnSpc>
@@ -7655,7 +7697,7 @@
                 <a:ea typeface="Calibri" pitchFamily="34" charset="-122"/>
                 <a:cs typeface="Calibri" pitchFamily="34" charset="-120"/>
               </a:rPr>
-              <a:t>частоты событий, time_sec, deaths, hints_used, score — с весами critical points из профиля игры</a:t>
+              <a:t>как часто происходят события, время в игре, смерти, подсказки, очки</a:t>
             </a:r>
             <a:endParaRPr lang="en-US" sz="1350" dirty="0"/>
           </a:p>
@@ -7696,7 +7738,7 @@
                 <a:ea typeface="Calibri" pitchFamily="34" charset="-122"/>
                 <a:cs typeface="Calibri" pitchFamily="34" charset="-120"/>
               </a:rPr>
-              <a:t xml:space="preserve">Классы: </a:t>
+              <a:t xml:space="preserve">Типы игроков: </a:t>
             </a:r>
             <a:pPr indent="0" marL="0">
               <a:lnSpc>
@@ -7837,7 +7879,7 @@
                 <a:ea typeface="Calibri" pitchFamily="34" charset="-122"/>
                 <a:cs typeface="Calibri" pitchFamily="34" charset="-120"/>
               </a:rPr>
-              <a:t>Правила не масштабируются</a:t>
+              <a:t>Жёсткие правила не годятся</a:t>
             </a:r>
             <a:endParaRPr lang="en-US" sz="1450" dirty="0"/>
           </a:p>
@@ -7879,7 +7921,7 @@
                 <a:ea typeface="Calibri" pitchFamily="34" charset="-122"/>
                 <a:cs typeface="Calibri" pitchFamily="34" charset="-120"/>
               </a:rPr>
-              <a:t>ручные if-else по метрикам быстро становятся неподдерживаемыми при росте числа событий и архетипов</a:t>
+              <a:t>все случаи прописать вручную невозможно — их слишком много</a:t>
             </a:r>
             <a:endParaRPr lang="en-US" sz="1150" dirty="0"/>
           </a:p>
@@ -8003,7 +8045,7 @@
                 <a:ea typeface="Calibri" pitchFamily="34" charset="-122"/>
                 <a:cs typeface="Calibri" pitchFamily="34" charset="-120"/>
               </a:rPr>
-              <a:t>Модель ловит динамику</a:t>
+              <a:t>Модель видит поведение целиком</a:t>
             </a:r>
             <a:endParaRPr lang="en-US" sz="1450" dirty="0"/>
           </a:p>
@@ -8045,7 +8087,7 @@
                 <a:ea typeface="Calibri" pitchFamily="34" charset="-122"/>
                 <a:cs typeface="Calibri" pitchFamily="34" charset="-120"/>
               </a:rPr>
-              <a:t>архетип определяется порядком и сочетанием действий, а не одним порогом</a:t>
+              <a:t>учитывает порядок и сочетание действий, а не один признак</a:t>
             </a:r>
             <a:endParaRPr lang="en-US" sz="1150" dirty="0"/>
           </a:p>
@@ -8169,7 +8211,7 @@
                 <a:ea typeface="Calibri" pitchFamily="34" charset="-122"/>
                 <a:cs typeface="Calibri" pitchFamily="34" charset="-120"/>
               </a:rPr>
-              <a:t>Дообучение на данных</a:t>
+              <a:t>Учится на данных</a:t>
             </a:r>
             <a:endParaRPr lang="en-US" sz="1450" dirty="0"/>
           </a:p>
@@ -8211,7 +8253,7 @@
                 <a:ea typeface="Calibri" pitchFamily="34" charset="-122"/>
                 <a:cs typeface="Calibri" pitchFamily="34" charset="-120"/>
               </a:rPr>
-              <a:t>модель улучшается по мере накопления реальной телеметрии в Postgres</a:t>
+              <a:t>становится точнее по мере накопления реальной статистики</a:t>
             </a:r>
             <a:endParaRPr lang="en-US" sz="1150" dirty="0"/>
           </a:p>
@@ -8313,7 +8355,7 @@
               <a:buNone/>
             </a:pPr>
             <a:r>
-              <a:rPr lang="en-US" sz="1250" b="1" spc="250" kern="0" dirty="0">
+              <a:rPr lang="en-US" sz="1500" b="1" spc="250" kern="0" dirty="0">
                 <a:solidFill>
                   <a:srgbClr val="1F9BD8"/>
                 </a:solidFill>
@@ -8323,7 +8365,7 @@
               </a:rPr>
               <a:t>НЕЙРОННАЯ МОДЕЛЬ · 2/3</a:t>
             </a:r>
-            <a:endParaRPr lang="en-US" sz="1250" dirty="0"/>
+            <a:endParaRPr lang="en-US" sz="1500" dirty="0"/>
           </a:p>
         </p:txBody>
       </p:sp>
@@ -9836,7 +9878,7 @@
               <a:buNone/>
             </a:pPr>
             <a:r>
-              <a:rPr lang="ru-RU" sz="1250" b="1" kern="0" dirty="0">
+              <a:rPr lang="ru-RU" sz="1500" b="1" kern="0" dirty="0">
                 <a:solidFill>
                   <a:srgbClr val="1F9BD8"/>
                 </a:solidFill>
@@ -11295,7 +11337,7 @@
               <a:buNone/>
             </a:pPr>
             <a:r>
-              <a:rPr lang="en-US" sz="1250" b="1" spc="250" kern="0" dirty="0">
+              <a:rPr lang="en-US" sz="1500" b="1" spc="250" kern="0" dirty="0">
                 <a:solidFill>
                   <a:srgbClr val="1F9BD8"/>
                 </a:solidFill>
@@ -11305,7 +11347,7 @@
               </a:rPr>
               <a:t>АРХИТЕКТУРА МОДЕЛИ</a:t>
             </a:r>
-            <a:endParaRPr lang="en-US" sz="1250" dirty="0"/>
+            <a:endParaRPr lang="en-US" sz="1500" dirty="0"/>
           </a:p>
         </p:txBody>
       </p:sp>
@@ -12344,7 +12386,7 @@
               <a:buNone/>
             </a:pPr>
             <a:r>
-              <a:rPr lang="en-US" sz="1250" b="1" spc="250" kern="0" dirty="0">
+              <a:rPr lang="en-US" sz="1500" b="1" spc="250" kern="0" dirty="0">
                 <a:solidFill>
                   <a:srgbClr val="1F9BD8"/>
                 </a:solidFill>
@@ -12354,7 +12396,7 @@
               </a:rPr>
               <a:t>ИНТЕГРАЦИЯ</a:t>
             </a:r>
-            <a:endParaRPr lang="en-US" sz="1250" dirty="0"/>
+            <a:endParaRPr lang="en-US" sz="1500" dirty="0"/>
           </a:p>
         </p:txBody>
       </p:sp>
@@ -13315,7 +13357,7 @@
               <a:buNone/>
             </a:pPr>
             <a:r>
-              <a:rPr lang="en-US" sz="1250" b="1" spc="250" kern="0" dirty="0">
+              <a:rPr lang="en-US" sz="1500" b="1" spc="250" kern="0" dirty="0">
                 <a:solidFill>
                   <a:srgbClr val="1F9BD8"/>
                 </a:solidFill>
@@ -13325,7 +13367,7 @@
               </a:rPr>
               <a:t>ЗАДЕЛЫ НА БУДУЩЕЕ</a:t>
             </a:r>
-            <a:endParaRPr lang="en-US" sz="1250" dirty="0"/>
+            <a:endParaRPr lang="en-US" sz="1500" dirty="0"/>
           </a:p>
         </p:txBody>
       </p:sp>
